--- a/public/fun/pack/pptx/newspro/카드뉴스프리미엄_47_건강·안심습관_다크로즈골드.pptx
+++ b/public/fun/pack/pptx/newspro/카드뉴스프리미엄_47_건강·안심습관_다크로즈골드.pptx
@@ -113,12 +113,12 @@
   <p:extLst>
     <p:ext uri="{521415D9-36F7-43E2-AB2F-B90AF26B5E84}">
       <p14:sectionLst xmlns:p14="http://schemas.microsoft.com/office/powerpoint/2010/main">
-        <p14:section name="시작" id="{8FADAE3E-AE9C-4033-AC03-F1AEAED80464}">
+        <p14:section name="시작" id="{00C07176-B24D-4A4D-98DE-A25D49428952}">
           <p14:sldIdLst>
             <p14:sldId id="256"/>
           </p14:sldIdLst>
         </p14:section>
-        <p14:section name="본문" id="{EC5650DF-8DCF-44E1-A80F-0854C3CA8CDF}">
+        <p14:section name="본문" id="{B3BD433E-ED61-4A79-A805-783DE39BD677}">
           <p14:sldIdLst>
             <p14:sldId id="257"/>
             <p14:sldId id="258"/>
@@ -127,7 +127,7 @@
             <p14:sldId id="261"/>
           </p14:sldIdLst>
         </p14:section>
-        <p14:section name="마무리" id="{F56597BF-46C8-45D8-B2E0-70E060708352}">
+        <p14:section name="마무리" id="{D75984C2-3A5C-4CB2-9ACA-31CCACB85DCF}">
           <p14:sldIdLst>
             <p14:sldId id="262"/>
           </p14:sldIdLst>
@@ -1542,7 +1542,7 @@
             </a:lvl1pPr>
           </a:lstStyle>
           <a:p>
-            <a:fld id="{08D6336F-2770-4B11-BB54-B248B55B7FD5}" type="slidenum">
+            <a:fld id="{ACAA0F0E-7CDD-448E-8B91-5C867D404209}" type="slidenum">
               <a:rPr lang="en-US"/>
               <a:t>‹#›</a:t>
             </a:fld>
@@ -2173,7 +2173,7 @@
             </a:lvl1pPr>
           </a:lstStyle>
           <a:p>
-            <a:fld id="{5B03A528-0262-4024-8CFA-1FAD6D70D1AB}" type="slidenum">
+            <a:fld id="{E9C23FC3-15ED-41E9-A358-34B2E28B38DF}" type="slidenum">
               <a:rPr lang="en-US"/>
               <a:t>‹#›</a:t>
             </a:fld>
@@ -2802,7 +2802,7 @@
             </a:lvl1pPr>
           </a:lstStyle>
           <a:p>
-            <a:fld id="{3A0F8C8F-6BDB-4067-9118-23E1011422A7}" type="slidenum">
+            <a:fld id="{DF99F574-3DF9-48DF-AEC9-133BD1B234DD}" type="slidenum">
               <a:rPr lang="en-US"/>
               <a:t>‹#›</a:t>
             </a:fld>
@@ -3633,7 +3633,7 @@
           <a:p>
             <a:r>
               <a:rPr lang="ko-KR"/>
-              <a:t>새해 건강 습관 하나만 정해 보세요</a:t>
+              <a:t>건강 습관 하나만 정해 보세요</a:t>
             </a:r>
           </a:p>
         </p:txBody>
@@ -3762,7 +3762,7 @@
           <a:bodyPr/>
           <a:lstStyle/>
           <a:p>
-            <a:fld id="{1F6C212D-48F6-42D0-85F3-D29620BCD58E}" type="slidenum">
+            <a:fld id="{D9E4BBC7-EFEA-4361-9C2B-C8968214349D}" type="slidenum">
               <a:rPr lang="en-US"/>
               <a:t>‹#›</a:t>
             </a:fld>
@@ -3928,7 +3928,7 @@
           <a:bodyPr/>
           <a:lstStyle/>
           <a:p>
-            <a:fld id="{7EE930B9-F3E4-494C-A426-11E4BE336243}" type="slidenum">
+            <a:fld id="{33C5FD15-196F-4BBF-BC2E-1F0F5AF9D787}" type="slidenum">
               <a:rPr lang="en-US"/>
               <a:t>‹#›</a:t>
             </a:fld>
@@ -4094,7 +4094,7 @@
           <a:bodyPr/>
           <a:lstStyle/>
           <a:p>
-            <a:fld id="{C6192F5B-950E-44E5-977A-0562090512CF}" type="slidenum">
+            <a:fld id="{D0B83A2E-839D-4DC4-B985-185EDB6AD151}" type="slidenum">
               <a:rPr lang="en-US"/>
               <a:t>‹#›</a:t>
             </a:fld>
@@ -4260,7 +4260,7 @@
           <a:bodyPr/>
           <a:lstStyle/>
           <a:p>
-            <a:fld id="{E69EAB6D-B846-4D94-9D7C-09103F5A66CA}" type="slidenum">
+            <a:fld id="{969D9D17-DECF-4D24-8B03-4768AE39D705}" type="slidenum">
               <a:rPr lang="en-US"/>
               <a:t>‹#›</a:t>
             </a:fld>
@@ -4426,7 +4426,7 @@
           <a:bodyPr/>
           <a:lstStyle/>
           <a:p>
-            <a:fld id="{5E5774B5-8BAB-4577-884D-530847AE4F9C}" type="slidenum">
+            <a:fld id="{A7A69900-73E2-4B9E-8881-90A5820F86A7}" type="slidenum">
               <a:rPr lang="en-US"/>
               <a:t>‹#›</a:t>
             </a:fld>
